--- a/docs/DBP-L2-mindline.pptx
+++ b/docs/DBP-L2-mindline.pptx
@@ -5027,7 +5027,7 @@
                 <a:ea typeface="Arial" pitchFamily="34" charset="-122"/>
                 <a:cs typeface="Arial" pitchFamily="34" charset="-120"/>
               </a:rPr>
-              <a:t>Weekday 13:00–16:00</a:t>
+              <a:t>Weekday 06:30–07:45 &amp; 13:00–15:30</a:t>
             </a:r>
             <a:endParaRPr lang="en-US" sz="1050" dirty="0"/>
           </a:p>
@@ -5066,7 +5066,7 @@
                 <a:ea typeface="Arial" pitchFamily="34" charset="-122"/>
                 <a:cs typeface="Arial" pitchFamily="34" charset="-120"/>
               </a:rPr>
-              <a:t>Primary dismissal and student-care pickup</a:t>
+              <a:t>The school run, both directions</a:t>
             </a:r>
             <a:endParaRPr lang="en-US" sz="900" dirty="0"/>
           </a:p>
@@ -5105,7 +5105,7 @@
                 <a:ea typeface="Arial" pitchFamily="34" charset="-122"/>
                 <a:cs typeface="Arial" pitchFamily="34" charset="-120"/>
               </a:rPr>
-              <a:t>Parent-facing: "Worried about your child? Talk to someone."</a:t>
+              <a:t>Child-facing: "Mind feeling under the weather?"</a:t>
             </a:r>
             <a:endParaRPr lang="en-US" sz="1100" dirty="0"/>
           </a:p>
